--- a/2025/ISIS_November_2025/2_Wednesday_November_5th/2_McStasScript/pptx/McStasScript_talk.pptx
+++ b/2025/ISIS_November_2025/2_Wednesday_November_5th/2_McStasScript/pptx/McStasScript_talk.pptx
@@ -215,7 +215,7 @@
           <a:p>
             <a:fld id="{75216F17-FF12-814E-936A-620B3383A43B}" type="datetimeFigureOut">
               <a:rPr lang="sv-SE" smtClean="0"/>
-              <a:t>2025-11-04</a:t>
+              <a:t>2025-11-05</a:t>
             </a:fld>
             <a:endParaRPr/>
           </a:p>
@@ -741,7 +741,7 @@
           <a:p>
             <a:fld id="{18896B66-0B3A-474C-9C9C-E4F07B1F5DAD}" type="datetime1">
               <a:rPr lang="sv-SE" smtClean="0"/>
-              <a:t>2025-11-04</a:t>
+              <a:t>2025-11-05</a:t>
             </a:fld>
             <a:endParaRPr lang="sv-SE" dirty="0"/>
           </a:p>
@@ -1337,7 +1337,7 @@
           <a:p>
             <a:fld id="{18896B66-0B3A-474C-9C9C-E4F07B1F5DAD}" type="datetime1">
               <a:rPr lang="sv-SE" smtClean="0"/>
-              <a:t>2025-11-04</a:t>
+              <a:t>2025-11-05</a:t>
             </a:fld>
             <a:endParaRPr lang="sv-SE" dirty="0"/>
           </a:p>
@@ -1977,7 +1977,7 @@
             <a:fld id="{18896B66-0B3A-474C-9C9C-E4F07B1F5DAD}" type="datetime1">
               <a:rPr lang="sv-SE" smtClean="0"/>
               <a:pPr/>
-              <a:t>2025-11-04</a:t>
+              <a:t>2025-11-05</a:t>
             </a:fld>
             <a:endParaRPr lang="sv-SE" dirty="0"/>
           </a:p>
@@ -2378,7 +2378,7 @@
           <a:p>
             <a:fld id="{18896B66-0B3A-474C-9C9C-E4F07B1F5DAD}" type="datetime1">
               <a:rPr lang="sv-SE" smtClean="0"/>
-              <a:t>2025-11-04</a:t>
+              <a:t>2025-11-05</a:t>
             </a:fld>
             <a:endParaRPr lang="sv-SE" dirty="0"/>
           </a:p>
@@ -3183,7 +3183,7 @@
           <a:p>
             <a:fld id="{18896B66-0B3A-474C-9C9C-E4F07B1F5DAD}" type="datetime1">
               <a:rPr lang="sv-SE" smtClean="0"/>
-              <a:t>2025-11-04</a:t>
+              <a:t>2025-11-05</a:t>
             </a:fld>
             <a:endParaRPr lang="sv-SE" dirty="0"/>
           </a:p>
@@ -3698,7 +3698,7 @@
           <a:p>
             <a:fld id="{18896B66-0B3A-474C-9C9C-E4F07B1F5DAD}" type="datetime1">
               <a:rPr lang="sv-SE" smtClean="0"/>
-              <a:t>2025-11-04</a:t>
+              <a:t>2025-11-05</a:t>
             </a:fld>
             <a:endParaRPr lang="sv-SE" dirty="0"/>
           </a:p>
@@ -4311,7 +4311,7 @@
           <a:p>
             <a:fld id="{18896B66-0B3A-474C-9C9C-E4F07B1F5DAD}" type="datetime1">
               <a:rPr lang="sv-SE" smtClean="0"/>
-              <a:t>2025-11-04</a:t>
+              <a:t>2025-11-05</a:t>
             </a:fld>
             <a:endParaRPr lang="sv-SE" dirty="0"/>
           </a:p>
@@ -4778,7 +4778,7 @@
           <a:p>
             <a:fld id="{18896B66-0B3A-474C-9C9C-E4F07B1F5DAD}" type="datetime1">
               <a:rPr lang="sv-SE" smtClean="0"/>
-              <a:t>2025-11-04</a:t>
+              <a:t>2025-11-05</a:t>
             </a:fld>
             <a:endParaRPr lang="sv-SE" dirty="0"/>
           </a:p>
@@ -5147,7 +5147,7 @@
           <a:p>
             <a:fld id="{926FFDD8-E9D5-414B-9D01-E73C6B8A8FCA}" type="datetime1">
               <a:rPr lang="sv-SE" smtClean="0"/>
-              <a:t>2025-11-04</a:t>
+              <a:t>2025-11-05</a:t>
             </a:fld>
             <a:endParaRPr lang="sv-SE"/>
           </a:p>
@@ -5794,7 +5794,7 @@
                 </a:solidFill>
               </a:rPr>
               <a:pPr/>
-              <a:t>2025-11-04</a:t>
+              <a:t>2025-11-05</a:t>
             </a:fld>
             <a:endParaRPr lang="en-GB" sz="1200" b="1" dirty="0">
               <a:solidFill>
@@ -14619,7 +14619,7 @@
         </p:nvSpPr>
         <p:spPr>
           <a:xfrm>
-            <a:off x="1094398" y="1562400"/>
+            <a:off x="1102731" y="1438102"/>
             <a:ext cx="8109892" cy="4768062"/>
           </a:xfrm>
         </p:spPr>
@@ -14640,41 +14640,42 @@
           <a:p>
             <a:pPr lvl="2"/>
             <a:r>
-              <a:rPr lang="en-US" sz="2000" dirty="0"/>
+              <a:rPr lang="en-US" dirty="0"/>
               <a:t>Questions that need to be answered by a number</a:t>
             </a:r>
           </a:p>
           <a:p>
             <a:pPr lvl="2"/>
-            <a:endParaRPr lang="en-US" sz="2000" dirty="0"/>
+            <a:endParaRPr lang="en-US" dirty="0"/>
           </a:p>
           <a:p>
             <a:pPr lvl="2"/>
-            <a:endParaRPr lang="en-US" sz="2000" dirty="0"/>
+            <a:endParaRPr lang="en-US" dirty="0"/>
           </a:p>
           <a:p>
             <a:pPr lvl="2"/>
             <a:r>
-              <a:rPr lang="en-US" sz="2000" dirty="0"/>
+              <a:rPr lang="en-US" dirty="0"/>
               <a:t>Multiple choice questions need a string, options typically A, B, C, D, …</a:t>
             </a:r>
           </a:p>
           <a:p>
             <a:pPr lvl="2"/>
-            <a:endParaRPr lang="en-US" sz="2000" dirty="0"/>
+            <a:endParaRPr lang="en-US" sz="2400" dirty="0"/>
           </a:p>
           <a:p>
             <a:pPr marL="252413" lvl="2" indent="0">
               <a:buNone/>
             </a:pPr>
+            <a:endParaRPr lang="en-US" dirty="0"/>
+          </a:p>
+          <a:p>
+            <a:pPr lvl="2"/>
+            <a:r>
+              <a:rPr lang="en-US" dirty="0"/>
+              <a:t>Instrument questions check you have set up an instrument correctly</a:t>
+            </a:r>
             <a:endParaRPr lang="en-US" sz="2000" dirty="0"/>
-          </a:p>
-          <a:p>
-            <a:pPr lvl="2"/>
-            <a:r>
-              <a:rPr lang="en-US" sz="2000" dirty="0"/>
-              <a:t>Instrument questions check you have set up an instrument correctly</a:t>
-            </a:r>
           </a:p>
           <a:p>
             <a:pPr lvl="2"/>
@@ -14738,7 +14739,7 @@
         </p:blipFill>
         <p:spPr>
           <a:xfrm>
-            <a:off x="1595629" y="2465020"/>
+            <a:off x="1728291" y="2235053"/>
             <a:ext cx="6565900" cy="736600"/>
           </a:xfrm>
           <a:prstGeom prst="rect">
@@ -14768,7 +14769,7 @@
         </p:blipFill>
         <p:spPr>
           <a:xfrm>
-            <a:off x="1579284" y="3791461"/>
+            <a:off x="1728291" y="3422709"/>
             <a:ext cx="6565900" cy="977900"/>
           </a:xfrm>
           <a:prstGeom prst="rect">
@@ -14798,8 +14799,8 @@
         </p:blipFill>
         <p:spPr>
           <a:xfrm>
-            <a:off x="1579284" y="5430681"/>
-            <a:ext cx="6692900" cy="736600"/>
+            <a:off x="1728291" y="4752385"/>
+            <a:ext cx="6565900" cy="722623"/>
           </a:xfrm>
           <a:prstGeom prst="rect">
             <a:avLst/>
@@ -14820,8 +14821,8 @@
         </p:nvSpPr>
         <p:spPr>
           <a:xfrm rot="640531">
-            <a:off x="7841911" y="1136053"/>
-            <a:ext cx="3854837" cy="707886"/>
+            <a:off x="7051503" y="888050"/>
+            <a:ext cx="4621436" cy="830997"/>
           </a:xfrm>
           <a:prstGeom prst="rect">
             <a:avLst/>
@@ -14836,7 +14837,7 @@
           <a:p>
             <a:pPr algn="ctr"/>
             <a:r>
-              <a:rPr lang="en-US" sz="2000" dirty="0">
+              <a:rPr lang="en-US" sz="2400" dirty="0">
                 <a:solidFill>
                   <a:srgbClr val="666666"/>
                 </a:solidFill>
@@ -14844,7 +14845,7 @@
               <a:t>Also </a:t>
             </a:r>
             <a:r>
-              <a:rPr lang="en-US" sz="2000" dirty="0" err="1">
+              <a:rPr lang="en-US" sz="2400" dirty="0" err="1">
                 <a:solidFill>
                   <a:srgbClr val="666666"/>
                 </a:solidFill>
@@ -14852,7 +14853,7 @@
               <a:t>cryostat_demo</a:t>
             </a:r>
             <a:r>
-              <a:rPr lang="en-US" sz="2000" dirty="0">
+              <a:rPr lang="en-US" sz="2400" dirty="0">
                 <a:solidFill>
                   <a:srgbClr val="666666"/>
                 </a:solidFill>
@@ -14860,18 +14861,99 @@
               <a:t> notebook if you are curious! Uses </a:t>
             </a:r>
             <a:r>
-              <a:rPr lang="en-US" sz="2000" dirty="0" err="1">
+              <a:rPr lang="en-US" sz="2400" dirty="0" err="1">
                 <a:solidFill>
                   <a:srgbClr val="666666"/>
                 </a:solidFill>
               </a:rPr>
               <a:t>NCrystal</a:t>
             </a:r>
-            <a:endParaRPr lang="en-US" sz="2000" dirty="0">
+            <a:endParaRPr lang="en-US" sz="2400" dirty="0">
               <a:solidFill>
                 <a:srgbClr val="666666"/>
               </a:solidFill>
             </a:endParaRPr>
+          </a:p>
+        </p:txBody>
+      </p:sp>
+      <p:sp>
+        <p:nvSpPr>
+          <p:cNvPr id="4" name="TextBox 3">
+            <a:extLst>
+              <a:ext uri="{FF2B5EF4-FFF2-40B4-BE49-F238E27FC236}">
+                <a16:creationId xmlns:a16="http://schemas.microsoft.com/office/drawing/2014/main" id="{F533AF57-65EE-0FC6-F23D-7805D6E2B558}"/>
+              </a:ext>
+            </a:extLst>
+          </p:cNvPr>
+          <p:cNvSpPr txBox="1"/>
+          <p:nvPr/>
+        </p:nvSpPr>
+        <p:spPr>
+          <a:xfrm>
+            <a:off x="1348100" y="5559815"/>
+            <a:ext cx="9495799" cy="830997"/>
+          </a:xfrm>
+          <a:prstGeom prst="rect">
+            <a:avLst/>
+          </a:prstGeom>
+          <a:noFill/>
+        </p:spPr>
+        <p:txBody>
+          <a:bodyPr wrap="square" rtlCol="0">
+            <a:spAutoFit/>
+          </a:bodyPr>
+          <a:lstStyle/>
+          <a:p>
+            <a:r>
+              <a:rPr lang="en-US" sz="2400" dirty="0">
+                <a:solidFill>
+                  <a:srgbClr val="666666"/>
+                </a:solidFill>
+              </a:rPr>
+              <a:t>Copy entire exercise and </a:t>
+            </a:r>
+            <a:r>
+              <a:rPr lang="en-US" sz="2400" dirty="0" err="1">
+                <a:solidFill>
+                  <a:srgbClr val="666666"/>
+                </a:solidFill>
+              </a:rPr>
+              <a:t>cryostat_demo</a:t>
+            </a:r>
+            <a:r>
+              <a:rPr lang="en-US" sz="2400" dirty="0">
+                <a:solidFill>
+                  <a:srgbClr val="666666"/>
+                </a:solidFill>
+              </a:rPr>
+              <a:t> folder to your environment</a:t>
+            </a:r>
+          </a:p>
+          <a:p>
+            <a:r>
+              <a:rPr lang="en-US" sz="2400" dirty="0">
+                <a:solidFill>
+                  <a:srgbClr val="666666"/>
+                </a:solidFill>
+              </a:rPr>
+              <a:t>Then quit your VISA instance and open as </a:t>
+            </a:r>
+            <a:r>
+              <a:rPr lang="en-US" sz="2400" dirty="0" err="1">
+                <a:solidFill>
+                  <a:srgbClr val="666666"/>
+                </a:solidFill>
+              </a:rPr>
+              <a:t>Jupyter</a:t>
+            </a:r>
+            <a:r>
+              <a:rPr lang="en-US" sz="2400" dirty="0">
+                <a:solidFill>
+                  <a:srgbClr val="666666"/>
+                </a:solidFill>
+              </a:rPr>
+              <a:t> Lab</a:t>
+            </a:r>
           </a:p>
         </p:txBody>
       </p:sp>
